--- a/TSS_T1_FitnessClassBooking.pptx
+++ b/TSS_T1_FitnessClassBooking.pptx
@@ -202,7 +202,7 @@
           <a:p>
             <a:fld id="{BA8AFA80-42E6-4D6E-98A8-76EB73FCA56B}" type="datetimeFigureOut">
               <a:rPr lang="en-US" smtClean="0"/>
-              <a:t>4/21/2026</a:t>
+              <a:t>4/22/2026</a:t>
             </a:fld>
             <a:endParaRPr lang="en-US"/>
           </a:p>
@@ -14357,11 +14357,7 @@
             </a:r>
             <a:r>
               <a:rPr lang="vi-VN" dirty="0"/>
-              <a:t> gestionează rezervările pentru o ședință de fitness. </a:t>
-            </a:r>
-            <a:r>
-              <a:rPr lang="vi-VN" dirty="0"/>
-              <a:t>Suportă locuri confirmate, o listă de așteptare de maximum 5 persoane și anulări cu promovare automată din waitlist.</a:t>
+              <a:t> gestionează rezervările pentru o ședință de fitness. Suportă locuri confirmate, o listă de așteptare de maximum 5 persoane și anulări cu promovare automată din waitlist.</a:t>
             </a:r>
             <a:endParaRPr lang="en-US" dirty="0"/>
           </a:p>
@@ -26473,8 +26469,8 @@
         </p:nvSpPr>
         <p:spPr>
           <a:xfrm>
-            <a:off x="228600" y="73152"/>
-            <a:ext cx="8686800" cy="475488"/>
+            <a:off x="182880" y="166818"/>
+            <a:ext cx="9220200" cy="400110"/>
           </a:xfrm>
           <a:prstGeom prst="rect">
             <a:avLst/>
@@ -26487,16 +26483,110 @@
           </a:bodyPr>
           <a:lstStyle/>
           <a:p>
-            <a:pPr algn="l"/>
-            <a:r>
-              <a:rPr sz="2200" b="1" i="0">
+            <a:r>
+              <a:rPr sz="2000" b="1" i="0" dirty="0" err="1">
                 <a:solidFill>
                   <a:srgbClr val="FFFFFF"/>
                 </a:solidFill>
                 <a:latin typeface="Nunito"/>
               </a:rPr>
-              <a:t>Strategia 6 – CFG &amp; Complexitate Ciclomatică (Basis Path)</a:t>
-            </a:r>
+              <a:t>Strategia</a:t>
+            </a:r>
+            <a:r>
+              <a:rPr sz="2000" b="1" i="0" dirty="0">
+                <a:solidFill>
+                  <a:srgbClr val="FFFFFF"/>
+                </a:solidFill>
+                <a:latin typeface="Nunito"/>
+              </a:rPr>
+              <a:t> 6 – </a:t>
+            </a:r>
+            <a:r>
+              <a:rPr lang="en-US" sz="2000" b="1" dirty="0"/>
+              <a:t>Graf de flux de </a:t>
+            </a:r>
+            <a:r>
+              <a:rPr lang="en-US" sz="2000" b="1" dirty="0" smtClean="0"/>
+              <a:t>control </a:t>
+            </a:r>
+            <a:r>
+              <a:rPr lang="en-US" sz="2000" b="1" dirty="0" smtClean="0">
+                <a:solidFill>
+                  <a:srgbClr val="FFFFFF"/>
+                </a:solidFill>
+                <a:latin typeface="Nunito"/>
+              </a:rPr>
+              <a:t>(</a:t>
+            </a:r>
+            <a:r>
+              <a:rPr sz="2000" b="1" i="0" dirty="0" smtClean="0">
+                <a:solidFill>
+                  <a:srgbClr val="FFFFFF"/>
+                </a:solidFill>
+                <a:latin typeface="Nunito"/>
+              </a:rPr>
+              <a:t>CFG</a:t>
+            </a:r>
+            <a:r>
+              <a:rPr lang="en-US" sz="2000" b="1" i="0" dirty="0" smtClean="0">
+                <a:solidFill>
+                  <a:srgbClr val="FFFFFF"/>
+                </a:solidFill>
+                <a:latin typeface="Nunito"/>
+              </a:rPr>
+              <a:t>)</a:t>
+            </a:r>
+            <a:r>
+              <a:rPr sz="2000" b="1" i="0" dirty="0" smtClean="0">
+                <a:solidFill>
+                  <a:srgbClr val="FFFFFF"/>
+                </a:solidFill>
+                <a:latin typeface="Nunito"/>
+              </a:rPr>
+              <a:t> </a:t>
+            </a:r>
+            <a:r>
+              <a:rPr sz="2000" b="1" i="0" dirty="0">
+                <a:solidFill>
+                  <a:srgbClr val="FFFFFF"/>
+                </a:solidFill>
+                <a:latin typeface="Nunito"/>
+              </a:rPr>
+              <a:t>&amp; </a:t>
+            </a:r>
+            <a:r>
+              <a:rPr sz="2000" b="1" i="0" dirty="0" err="1">
+                <a:solidFill>
+                  <a:srgbClr val="FFFFFF"/>
+                </a:solidFill>
+                <a:latin typeface="Nunito"/>
+              </a:rPr>
+              <a:t>Complexitate</a:t>
+            </a:r>
+            <a:r>
+              <a:rPr sz="2000" b="1" i="0" dirty="0">
+                <a:solidFill>
+                  <a:srgbClr val="FFFFFF"/>
+                </a:solidFill>
+                <a:latin typeface="Nunito"/>
+              </a:rPr>
+              <a:t> </a:t>
+            </a:r>
+            <a:r>
+              <a:rPr sz="2000" b="1" i="0" dirty="0" err="1" smtClean="0">
+                <a:solidFill>
+                  <a:srgbClr val="FFFFFF"/>
+                </a:solidFill>
+                <a:latin typeface="Nunito"/>
+              </a:rPr>
+              <a:t>Ciclomatică</a:t>
+            </a:r>
+            <a:endParaRPr sz="2000" b="1" i="0" dirty="0">
+              <a:solidFill>
+                <a:srgbClr val="FFFFFF"/>
+              </a:solidFill>
+              <a:latin typeface="Nunito"/>
+            </a:endParaRPr>
           </a:p>
         </p:txBody>
       </p:sp>

--- a/TSS_T1_FitnessClassBooking.pptx
+++ b/TSS_T1_FitnessClassBooking.pptx
@@ -9801,7 +9801,7 @@
         <p:spPr>
           <a:xfrm>
             <a:off x="2478024" y="1005840"/>
-            <a:ext cx="1956816" cy="201168"/>
+            <a:ext cx="1956816" cy="246221"/>
           </a:xfrm>
           <a:prstGeom prst="rect">
             <a:avLst/>
@@ -9816,13 +9816,58 @@
           <a:p>
             <a:pPr algn="l"/>
             <a:r>
-              <a:rPr sz="1000" b="1" i="0">
+              <a:rPr sz="1000" b="1" i="0" dirty="0" smtClean="0">
                 <a:solidFill>
                   <a:srgbClr val="FFFFFF"/>
                 </a:solidFill>
                 <a:latin typeface="Nunito"/>
               </a:rPr>
-              <a:t>stmt coverage</a:t>
+              <a:t>st</a:t>
+            </a:r>
+            <a:r>
+              <a:rPr lang="en-US" sz="1000" b="1" i="0" dirty="0" smtClean="0">
+                <a:solidFill>
+                  <a:srgbClr val="FFFFFF"/>
+                </a:solidFill>
+                <a:latin typeface="Nunito"/>
+              </a:rPr>
+              <a:t>ate</a:t>
+            </a:r>
+            <a:r>
+              <a:rPr sz="1000" b="1" i="0" dirty="0" smtClean="0">
+                <a:solidFill>
+                  <a:srgbClr val="FFFFFF"/>
+                </a:solidFill>
+                <a:latin typeface="Nunito"/>
+              </a:rPr>
+              <a:t>m</a:t>
+            </a:r>
+            <a:r>
+              <a:rPr lang="en-US" sz="1000" b="1" i="0" dirty="0" smtClean="0">
+                <a:solidFill>
+                  <a:srgbClr val="FFFFFF"/>
+                </a:solidFill>
+                <a:latin typeface="Nunito"/>
+              </a:rPr>
+              <a:t>en</a:t>
+            </a:r>
+            <a:r>
+              <a:rPr sz="1000" b="1" i="0" dirty="0" smtClean="0">
+                <a:solidFill>
+                  <a:srgbClr val="FFFFFF"/>
+                </a:solidFill>
+                <a:latin typeface="Nunito"/>
+              </a:rPr>
+              <a:t>t </a:t>
+            </a:r>
+            <a:r>
+              <a:rPr sz="1000" b="1" i="0" dirty="0">
+                <a:solidFill>
+                  <a:srgbClr val="FFFFFF"/>
+                </a:solidFill>
+                <a:latin typeface="Nunito"/>
+              </a:rPr>
+              <a:t>coverage</a:t>
             </a:r>
           </a:p>
         </p:txBody>

--- a/TSS_T1_FitnessClassBooking.pptx
+++ b/TSS_T1_FitnessClassBooking.pptx
@@ -567,6 +567,90 @@
         </p:txBody>
       </p:sp>
     </p:spTree>
+  </p:cSld>
+  <p:clrMapOvr>
+    <a:masterClrMapping/>
+  </p:clrMapOvr>
+</p:notes>
+</file>
+
+<file path=ppt/notesSlides/notesSlide2.xml><?xml version="1.0" encoding="utf-8"?>
+<p:notes xmlns:a="http://schemas.openxmlformats.org/drawingml/2006/main" xmlns:r="http://schemas.openxmlformats.org/officeDocument/2006/relationships" xmlns:p="http://schemas.openxmlformats.org/presentationml/2006/main">
+  <p:cSld>
+    <p:spTree>
+      <p:nvGrpSpPr>
+        <p:cNvPr id="1" name=""/>
+        <p:cNvGrpSpPr/>
+        <p:nvPr/>
+      </p:nvGrpSpPr>
+      <p:grpSpPr>
+        <a:xfrm>
+          <a:off x="0" y="0"/>
+          <a:ext cx="0" cy="0"/>
+          <a:chOff x="0" y="0"/>
+          <a:chExt cx="0" cy="0"/>
+        </a:xfrm>
+      </p:grpSpPr>
+      <p:sp>
+        <p:nvSpPr>
+          <p:cNvPr id="2" name="Slide Image Placeholder 1"/>
+          <p:cNvSpPr>
+            <a:spLocks noGrp="1" noRot="1" noChangeAspect="1"/>
+          </p:cNvSpPr>
+          <p:nvPr>
+            <p:ph type="sldImg"/>
+          </p:nvPr>
+        </p:nvSpPr>
+        <p:spPr/>
+      </p:sp>
+      <p:sp>
+        <p:nvSpPr>
+          <p:cNvPr id="3" name="Notes Placeholder 2"/>
+          <p:cNvSpPr>
+            <a:spLocks noGrp="1"/>
+          </p:cNvSpPr>
+          <p:nvPr>
+            <p:ph type="body" idx="1"/>
+          </p:nvPr>
+        </p:nvSpPr>
+        <p:spPr/>
+        <p:txBody>
+          <a:bodyPr/>
+          <a:lstStyle/>
+          <a:p>
+            <a:endParaRPr lang="en-US" dirty="0"/>
+          </a:p>
+        </p:txBody>
+      </p:sp>
+      <p:sp>
+        <p:nvSpPr>
+          <p:cNvPr id="4" name="Slide Number Placeholder 3"/>
+          <p:cNvSpPr>
+            <a:spLocks noGrp="1"/>
+          </p:cNvSpPr>
+          <p:nvPr>
+            <p:ph type="sldNum" sz="quarter" idx="10"/>
+          </p:nvPr>
+        </p:nvSpPr>
+        <p:spPr/>
+        <p:txBody>
+          <a:bodyPr/>
+          <a:lstStyle/>
+          <a:p>
+            <a:fld id="{4D5EFDED-03A5-4C32-9A03-CAB6ED320F3F}" type="slidenum">
+              <a:rPr lang="en-US" smtClean="0"/>
+              <a:t>8</a:t>
+            </a:fld>
+            <a:endParaRPr lang="en-US"/>
+          </a:p>
+        </p:txBody>
+      </p:sp>
+    </p:spTree>
+    <p:extLst>
+      <p:ext uri="{BB962C8B-B14F-4D97-AF65-F5344CB8AC3E}">
+        <p14:creationId xmlns:p14="http://schemas.microsoft.com/office/powerpoint/2010/main" val="1039729880"/>
+      </p:ext>
+    </p:extLst>
   </p:cSld>
   <p:clrMapOvr>
     <a:masterClrMapping/>
@@ -27509,30 +27593,6 @@
           <p:nvPr/>
         </p:nvPicPr>
         <p:blipFill>
-          <a:blip r:embed="rId2"/>
-          <a:stretch>
-            <a:fillRect/>
-          </a:stretch>
-        </p:blipFill>
-        <p:spPr>
-          <a:xfrm>
-            <a:off x="259080" y="2094392"/>
-            <a:ext cx="2103120" cy="2724496"/>
-          </a:xfrm>
-          <a:prstGeom prst="rect">
-            <a:avLst/>
-          </a:prstGeom>
-        </p:spPr>
-      </p:pic>
-      <p:pic>
-        <p:nvPicPr>
-          <p:cNvPr id="28" name="Picture 27" descr="book_spot_cfg.drawio.png"/>
-          <p:cNvPicPr>
-            <a:picLocks noChangeAspect="1"/>
-          </p:cNvPicPr>
-          <p:nvPr/>
-        </p:nvPicPr>
-        <p:blipFill>
           <a:blip r:embed="rId3"/>
           <a:stretch>
             <a:fillRect/>
@@ -27540,56 +27600,8 @@
         </p:blipFill>
         <p:spPr>
           <a:xfrm>
-            <a:off x="2404872" y="2212848"/>
-            <a:ext cx="2011680" cy="2606040"/>
-          </a:xfrm>
-          <a:prstGeom prst="rect">
-            <a:avLst/>
-          </a:prstGeom>
-        </p:spPr>
-      </p:pic>
-      <p:pic>
-        <p:nvPicPr>
-          <p:cNvPr id="30" name="Picture 29" descr="cancel_booking_cfg.drawio.png"/>
-          <p:cNvPicPr>
-            <a:picLocks noChangeAspect="1"/>
-          </p:cNvPicPr>
-          <p:nvPr/>
-        </p:nvPicPr>
-        <p:blipFill>
-          <a:blip r:embed="rId4"/>
-          <a:stretch>
-            <a:fillRect/>
-          </a:stretch>
-        </p:blipFill>
-        <p:spPr>
-          <a:xfrm>
-            <a:off x="4626864" y="2212848"/>
-            <a:ext cx="2011680" cy="2606040"/>
-          </a:xfrm>
-          <a:prstGeom prst="rect">
-            <a:avLst/>
-          </a:prstGeom>
-        </p:spPr>
-      </p:pic>
-      <p:pic>
-        <p:nvPicPr>
-          <p:cNvPr id="32" name="Picture 31" descr="calculate_cost_cfg.drawio.png"/>
-          <p:cNvPicPr>
-            <a:picLocks noChangeAspect="1"/>
-          </p:cNvPicPr>
-          <p:nvPr/>
-        </p:nvPicPr>
-        <p:blipFill>
-          <a:blip r:embed="rId5"/>
-          <a:stretch>
-            <a:fillRect/>
-          </a:stretch>
-        </p:blipFill>
-        <p:spPr>
-          <a:xfrm>
-            <a:off x="6848856" y="2212848"/>
-            <a:ext cx="2011680" cy="2606040"/>
+            <a:off x="228258" y="2094392"/>
+            <a:ext cx="2103120" cy="2724496"/>
           </a:xfrm>
           <a:prstGeom prst="rect">
             <a:avLst/>
@@ -27827,6 +27839,198 @@
           </a:p>
         </p:txBody>
       </p:sp>
+      <p:pic>
+        <p:nvPicPr>
+          <p:cNvPr id="1026" name="Picture 2"/>
+          <p:cNvPicPr>
+            <a:picLocks noChangeAspect="1" noChangeArrowheads="1"/>
+          </p:cNvPicPr>
+          <p:nvPr/>
+        </p:nvPicPr>
+        <p:blipFill>
+          <a:blip r:embed="rId4" cstate="print">
+            <a:extLst>
+              <a:ext uri="{28A0092B-C50C-407E-A947-70E740481C1C}">
+                <a14:useLocalDpi xmlns:a14="http://schemas.microsoft.com/office/drawing/2010/main" val="0"/>
+              </a:ext>
+            </a:extLst>
+          </a:blip>
+          <a:srcRect/>
+          <a:stretch>
+            <a:fillRect/>
+          </a:stretch>
+        </p:blipFill>
+        <p:spPr bwMode="auto">
+          <a:xfrm>
+            <a:off x="2331378" y="2180939"/>
+            <a:ext cx="2176614" cy="2666366"/>
+          </a:xfrm>
+          <a:prstGeom prst="rect">
+            <a:avLst/>
+          </a:prstGeom>
+          <a:noFill/>
+          <a:ln>
+            <a:noFill/>
+          </a:ln>
+          <a:effectLst/>
+          <a:extLst>
+            <a:ext uri="{909E8E84-426E-40DD-AFC4-6F175D3DCCD1}">
+              <a14:hiddenFill xmlns:a14="http://schemas.microsoft.com/office/drawing/2010/main">
+                <a:solidFill>
+                  <a:schemeClr val="accent1"/>
+                </a:solidFill>
+              </a14:hiddenFill>
+            </a:ext>
+            <a:ext uri="{91240B29-F687-4F45-9708-019B960494DF}">
+              <a14:hiddenLine xmlns:a14="http://schemas.microsoft.com/office/drawing/2010/main" w="9525">
+                <a:solidFill>
+                  <a:schemeClr val="tx1"/>
+                </a:solidFill>
+                <a:miter lim="800000"/>
+                <a:headEnd/>
+                <a:tailEnd/>
+              </a14:hiddenLine>
+            </a:ext>
+            <a:ext uri="{AF507438-7753-43E0-B8FC-AC1667EBCBE1}">
+              <a14:hiddenEffects xmlns:a14="http://schemas.microsoft.com/office/drawing/2010/main">
+                <a:effectLst>
+                  <a:outerShdw dist="35921" dir="2700000" algn="ctr" rotWithShape="0">
+                    <a:schemeClr val="bg2"/>
+                  </a:outerShdw>
+                </a:effectLst>
+              </a14:hiddenEffects>
+            </a:ext>
+          </a:extLst>
+        </p:spPr>
+      </p:pic>
+      <p:pic>
+        <p:nvPicPr>
+          <p:cNvPr id="1027" name="Picture 3"/>
+          <p:cNvPicPr>
+            <a:picLocks noChangeAspect="1" noChangeArrowheads="1"/>
+          </p:cNvPicPr>
+          <p:nvPr/>
+        </p:nvPicPr>
+        <p:blipFill>
+          <a:blip r:embed="rId5" cstate="print">
+            <a:extLst>
+              <a:ext uri="{28A0092B-C50C-407E-A947-70E740481C1C}">
+                <a14:useLocalDpi xmlns:a14="http://schemas.microsoft.com/office/drawing/2010/main" val="0"/>
+              </a:ext>
+            </a:extLst>
+          </a:blip>
+          <a:srcRect/>
+          <a:stretch>
+            <a:fillRect/>
+          </a:stretch>
+        </p:blipFill>
+        <p:spPr bwMode="auto">
+          <a:xfrm>
+            <a:off x="4572000" y="2116931"/>
+            <a:ext cx="2209800" cy="2701957"/>
+          </a:xfrm>
+          <a:prstGeom prst="rect">
+            <a:avLst/>
+          </a:prstGeom>
+          <a:noFill/>
+          <a:ln>
+            <a:noFill/>
+          </a:ln>
+          <a:effectLst/>
+          <a:extLst>
+            <a:ext uri="{909E8E84-426E-40DD-AFC4-6F175D3DCCD1}">
+              <a14:hiddenFill xmlns:a14="http://schemas.microsoft.com/office/drawing/2010/main">
+                <a:solidFill>
+                  <a:schemeClr val="accent1"/>
+                </a:solidFill>
+              </a14:hiddenFill>
+            </a:ext>
+            <a:ext uri="{91240B29-F687-4F45-9708-019B960494DF}">
+              <a14:hiddenLine xmlns:a14="http://schemas.microsoft.com/office/drawing/2010/main" w="9525">
+                <a:solidFill>
+                  <a:schemeClr val="tx1"/>
+                </a:solidFill>
+                <a:miter lim="800000"/>
+                <a:headEnd/>
+                <a:tailEnd/>
+              </a14:hiddenLine>
+            </a:ext>
+            <a:ext uri="{AF507438-7753-43E0-B8FC-AC1667EBCBE1}">
+              <a14:hiddenEffects xmlns:a14="http://schemas.microsoft.com/office/drawing/2010/main">
+                <a:effectLst>
+                  <a:outerShdw dist="35921" dir="2700000" algn="ctr" rotWithShape="0">
+                    <a:schemeClr val="bg2"/>
+                  </a:outerShdw>
+                </a:effectLst>
+              </a14:hiddenEffects>
+            </a:ext>
+          </a:extLst>
+        </p:spPr>
+      </p:pic>
+      <p:pic>
+        <p:nvPicPr>
+          <p:cNvPr id="1028" name="Picture 4"/>
+          <p:cNvPicPr>
+            <a:picLocks noChangeAspect="1" noChangeArrowheads="1"/>
+          </p:cNvPicPr>
+          <p:nvPr/>
+        </p:nvPicPr>
+        <p:blipFill>
+          <a:blip r:embed="rId6" cstate="print">
+            <a:extLst>
+              <a:ext uri="{28A0092B-C50C-407E-A947-70E740481C1C}">
+                <a14:useLocalDpi xmlns:a14="http://schemas.microsoft.com/office/drawing/2010/main" val="0"/>
+              </a:ext>
+            </a:extLst>
+          </a:blip>
+          <a:srcRect/>
+          <a:stretch>
+            <a:fillRect/>
+          </a:stretch>
+        </p:blipFill>
+        <p:spPr bwMode="auto">
+          <a:xfrm>
+            <a:off x="6781800" y="2068164"/>
+            <a:ext cx="2133600" cy="2750724"/>
+          </a:xfrm>
+          <a:prstGeom prst="rect">
+            <a:avLst/>
+          </a:prstGeom>
+          <a:noFill/>
+          <a:ln>
+            <a:noFill/>
+          </a:ln>
+          <a:effectLst/>
+          <a:extLst>
+            <a:ext uri="{909E8E84-426E-40DD-AFC4-6F175D3DCCD1}">
+              <a14:hiddenFill xmlns:a14="http://schemas.microsoft.com/office/drawing/2010/main">
+                <a:solidFill>
+                  <a:schemeClr val="accent1"/>
+                </a:solidFill>
+              </a14:hiddenFill>
+            </a:ext>
+            <a:ext uri="{91240B29-F687-4F45-9708-019B960494DF}">
+              <a14:hiddenLine xmlns:a14="http://schemas.microsoft.com/office/drawing/2010/main" w="9525">
+                <a:solidFill>
+                  <a:schemeClr val="tx1"/>
+                </a:solidFill>
+                <a:miter lim="800000"/>
+                <a:headEnd/>
+                <a:tailEnd/>
+              </a14:hiddenLine>
+            </a:ext>
+            <a:ext uri="{AF507438-7753-43E0-B8FC-AC1667EBCBE1}">
+              <a14:hiddenEffects xmlns:a14="http://schemas.microsoft.com/office/drawing/2010/main">
+                <a:effectLst>
+                  <a:outerShdw dist="35921" dir="2700000" algn="ctr" rotWithShape="0">
+                    <a:schemeClr val="bg2"/>
+                  </a:outerShdw>
+                </a:effectLst>
+              </a14:hiddenEffects>
+            </a:ext>
+          </a:extLst>
+        </p:spPr>
+      </p:pic>
     </p:spTree>
     <p:extLst>
       <p:ext uri="{BB962C8B-B14F-4D97-AF65-F5344CB8AC3E}">

--- a/TSS_T1_FitnessClassBooking.pptx
+++ b/TSS_T1_FitnessClassBooking.pptx
@@ -3646,7 +3646,7 @@
                 </a:solidFill>
                 <a:latin typeface="Calibri"/>
               </a:rPr>
-              <a:t>99</a:t>
+              <a:t>100</a:t>
             </a:r>
           </a:p>
         </p:txBody>
@@ -4280,7 +4280,7 @@
                 </a:solidFill>
                 <a:latin typeface="Calibri"/>
               </a:rPr>
-              <a:t>99</a:t>
+              <a:t>100</a:t>
             </a:r>
           </a:p>
         </p:txBody>
@@ -5210,7 +5210,7 @@
                 </a:solidFill>
                 <a:latin typeface="Calibri"/>
               </a:rPr>
-              <a:t>README.md – documentație completă (710 linii)</a:t>
+              <a:t>README.md – documentație completă (713 linii)</a:t>
             </a:r>
           </a:p>
         </p:txBody>
@@ -5366,7 +5366,7 @@
                 </a:solidFill>
                 <a:latin typeface="Calibri"/>
               </a:rPr>
-              <a:t>test_*.py (5 fișiere) – suita principală 99 teste</a:t>
+              <a:t>test_*.py (5 fișiere) – suita principală 100 teste</a:t>
             </a:r>
           </a:p>
         </p:txBody>
@@ -11188,7 +11188,7 @@
                 </a:solidFill>
                 <a:latin typeface="Calibri"/>
               </a:rPr>
-              <a:t>99 teste organizate pe tehnicile cerute în tema T1</a:t>
+              <a:t>100 teste organizate pe tehnicile cerute în tema T1</a:t>
             </a:r>
           </a:p>
         </p:txBody>
@@ -11371,7 +11371,7 @@
                           </a:solidFill>
                           <a:latin typeface="Calibri"/>
                         </a:rPr>
-                        <a:t>22</a:t>
+                        <a:t>23</a:t>
                       </a:r>
                     </a:p>
                   </a:txBody>
@@ -11936,7 +11936,7 @@
                 </a:solidFill>
                 <a:latin typeface="Calibri"/>
               </a:rPr>
-              <a:t>99 teste</a:t>
+              <a:t>100 teste</a:t>
             </a:r>
           </a:p>
         </p:txBody>
@@ -12127,7 +12127,7 @@
                 </a:solidFill>
                 <a:latin typeface="Calibri"/>
               </a:rPr>
-              <a:t>22 + 16 = 38</a:t>
+              <a:t>23 + 16 = 39</a:t>
             </a:r>
           </a:p>
         </p:txBody>
@@ -12796,7 +12796,7 @@
                 </a:solidFill>
                 <a:latin typeface="Calibri"/>
               </a:rPr>
-              <a:t>22 teste pentru echivalență  +  16 teste pentru valori de frontieră</a:t>
+              <a:t>23 teste pentru echivalență  +  16 teste pentru valori de frontieră</a:t>
             </a:r>
           </a:p>
         </p:txBody>
@@ -18630,7 +18630,7 @@
                 </a:solidFill>
                 <a:latin typeface="Calibri"/>
               </a:rPr>
-              <a:t>80</a:t>
+              <a:t>85</a:t>
             </a:r>
           </a:p>
         </p:txBody>
@@ -18700,7 +18700,7 @@
                 </a:solidFill>
                 <a:latin typeface="Calibri"/>
               </a:rPr>
-              <a:t>15</a:t>
+              <a:t>10</a:t>
             </a:r>
           </a:p>
         </p:txBody>
@@ -20966,7 +20966,7 @@
                           </a:solidFill>
                           <a:latin typeface="Calibri"/>
                         </a:rPr>
-                        <a:t>99</a:t>
+                        <a:t>100</a:t>
                       </a:r>
                     </a:p>
                   </a:txBody>
